--- a/15-dars - Matnni izlash, almashtirish, chop etish va himoya bilan bog'liq ko'nikmalar/15-dars - Slayd.pptx
+++ b/15-dars - Matnni izlash, almashtirish, chop etish va himoya bilan bog'liq ko'nikmalar/15-dars - Slayd.pptx
@@ -3977,7 +3977,7 @@
                 <a:ea typeface="Calibri" pitchFamily="34" charset="-122"/>
                 <a:cs typeface="Calibri" pitchFamily="34" charset="-120"/>
               </a:rPr>
-              <a:t>"Topib almashtirаman" — matn detektivi</a:t>
+              <a:t>"Topib almashtiraman" — matn detektivi</a:t>
             </a:r>
             <a:endParaRPr lang="en-US" sz="1500" dirty="0"/>
           </a:p>
